--- a/Idea Submission _ AWS AI for Bharat Hackathon.pptx
+++ b/Idea Submission _ AWS AI for Bharat Hackathon.pptx
@@ -5406,7 +5406,7 @@
                 <a:latin typeface="Manrope SemiBold"/>
                 <a:ea typeface="Manrope SemiBold"/>
               </a:rPr>
-              <a:t>DiabetCare AI solves India's diabetes crisis through early detection and continuous prevention, breaking the catastrophic cycle where 60-70% of complications are diagnosed too late.</a:t>
+              <a:t>DiabetCare AI solves India's diabetes crisis through early detection and continuous prevention, breaking the catastrophic cycle where 43% of diabetics remain undiagnosed (IDF Atlas 11th Edition, 2025), with many diagnosed only when complications are already present.</a:t>
             </a:r>
             <a:r>
               <a:rPr b="0" lang="en-GB" sz="1050" spc="-1" strike="noStrike">
